--- a/ppt/IoTAI19-TF-GPU.pptx
+++ b/ppt/IoTAI19-TF-GPU.pptx
@@ -4249,8 +4249,13 @@
             </a:r>
             <a:r>
               <a:rPr lang="en-US" dirty="0"/>
-              <a:t> parallelizable</a:t>
-            </a:r>
+              <a:t> </a:t>
+            </a:r>
+            <a:r>
+              <a:rPr lang="en-US" dirty="0" err="1"/>
+              <a:t>parallelisable</a:t>
+            </a:r>
+            <a:endParaRPr lang="en-US" dirty="0"/>
           </a:p>
           <a:p>
             <a:pPr lvl="1"/>
@@ -4578,7 +4583,7 @@
             <a:pPr lvl="1"/>
             <a:r>
               <a:rPr lang="fr-FR" dirty="0"/>
-              <a:t>Au lieu de n*m cycles pour un CPU avec n les nombre d'inputs des perceptrons et m le nombre de neurone sur le layer</a:t>
+              <a:t>Au lieu de n*m cycles pour un CPU avec n le nombre d'inputs des perceptrons et m le nombre de neurone sur le layer</a:t>
             </a:r>
           </a:p>
           <a:p>
